--- a/assets/pptx/catalog-270.pptx
+++ b/assets/pptx/catalog-270.pptx
@@ -3275,7 +3275,7 @@
                 <a:ea typeface="Ebrima"/>
                 <a:cs typeface="Ebrima"/>
               </a:rPr>
-              <a:t>ምን ዓይነት ሰራዊት ነው (2x)</a:t>
+              <a:t>ምን ዓይነት ሰራዊት ነው 2x</a:t>
             </a:r>
           </a:p>
           <a:p>
@@ -3558,7 +3558,7 @@
                 <a:ea typeface="Ebrima"/>
                 <a:cs typeface="Ebrima"/>
               </a:rPr>
-              <a:t>ምድር ጉድ ፈላባት (2x) እኛ መጣንባት</a:t>
+              <a:t>ምድር ጉድ ፈላባት 2x እኛ መጣንባት</a:t>
             </a:r>
           </a:p>
           <a:p>
@@ -3576,7 +3576,7 @@
                 <a:ea typeface="Ebrima"/>
                 <a:cs typeface="Ebrima"/>
               </a:rPr>
-              <a:t>ምድር አለፈላት (2x) እኛ መጣላት</a:t>
+              <a:t>ምድር አለፈላት 2x እኛ መጣላት</a:t>
             </a:r>
           </a:p>
           <a:p>
@@ -3594,7 +3594,7 @@
                 <a:ea typeface="Ebrima"/>
                 <a:cs typeface="Ebrima"/>
               </a:rPr>
-              <a:t>ኢትዮጵያ አለፈላት (2x) ሰራዊት በዛላት</a:t>
+              <a:t>ኢትዮጵያ አለፈላት 2x ሰራዊት በዛላት</a:t>
             </a:r>
           </a:p>
           <a:p>
@@ -3612,7 +3612,7 @@
                 <a:ea typeface="Ebrima"/>
                 <a:cs typeface="Ebrima"/>
               </a:rPr>
-              <a:t>ኢትዮጵያ አለፈላት (2x) እኔ መጣሁላት</a:t>
+              <a:t>ኢትዮጵያ አለፈላት 2x እኔ መጣሁላት</a:t>
             </a:r>
           </a:p>
         </p:txBody>
@@ -3697,7 +3697,7 @@
                 <a:ea typeface="Ebrima"/>
                 <a:cs typeface="Ebrima"/>
               </a:rPr>
-              <a:t>ምን ዓይነት ሰራዊት ነው (2x)</a:t>
+              <a:t>ምን ዓይነት ሰራዊት ነው 2x</a:t>
             </a:r>
           </a:p>
           <a:p>
@@ -3962,7 +3962,7 @@
                 <a:ea typeface="Ebrima"/>
                 <a:cs typeface="Ebrima"/>
               </a:rPr>
-              <a:t>ምድር ጉድ ፈላባት (2x) ሰራዊት መጣባት</a:t>
+              <a:t>ምድር ጉድ ፈላባት 2x ሰራዊት መጣባት</a:t>
             </a:r>
           </a:p>
           <a:p>
@@ -3980,7 +3980,7 @@
                 <a:ea typeface="Ebrima"/>
                 <a:cs typeface="Ebrima"/>
               </a:rPr>
-              <a:t>ምድር አለፈላት (2x) ኃይለኞች መጡላት</a:t>
+              <a:t>ምድር አለፈላት 2x ኃይለኞች መጡላት</a:t>
             </a:r>
           </a:p>
           <a:p>
@@ -3998,7 +3998,7 @@
                 <a:ea typeface="Ebrima"/>
                 <a:cs typeface="Ebrima"/>
               </a:rPr>
-              <a:t>ምድሬ አለፈላት (2x) ጌታዬ ጐበኛት</a:t>
+              <a:t>ምድሬ አለፈላት 2x ጌታዬ ጐበኛት</a:t>
             </a:r>
           </a:p>
           <a:p>
@@ -4016,7 +4016,7 @@
                 <a:ea typeface="Ebrima"/>
                 <a:cs typeface="Ebrima"/>
               </a:rPr>
-              <a:t>ምድሬ አለፈላት (2x) ሰራዊት መጣላት</a:t>
+              <a:t>ምድሬ አለፈላት 2x ሰራዊት መጣላት</a:t>
             </a:r>
           </a:p>
         </p:txBody>
@@ -4101,7 +4101,7 @@
                 <a:ea typeface="Ebrima"/>
                 <a:cs typeface="Ebrima"/>
               </a:rPr>
-              <a:t>ምን ዓይነት ሰራዊት ነው (2x)</a:t>
+              <a:t>ምን ዓይነት ሰራዊት ነው 2x</a:t>
             </a:r>
           </a:p>
           <a:p>
@@ -4348,7 +4348,7 @@
                 <a:ea typeface="Ebrima"/>
                 <a:cs typeface="Ebrima"/>
               </a:rPr>
-              <a:t>ምድር ጉድ ፈላባት (2x) ቆራጦች መጡባት</a:t>
+              <a:t>ምድር ጉድ ፈላባት 2x ቆራጦች መጡባት</a:t>
             </a:r>
           </a:p>
           <a:p>
@@ -4366,7 +4366,7 @@
                 <a:ea typeface="Ebrima"/>
                 <a:cs typeface="Ebrima"/>
               </a:rPr>
-              <a:t>ምድር አለፈላት (2x) ጌታ ሰው ላከላት</a:t>
+              <a:t>ምድር አለፈላት 2x ጌታ ሰው ላከላት</a:t>
             </a:r>
           </a:p>
           <a:p>
@@ -4384,7 +4384,7 @@
                 <a:ea typeface="Ebrima"/>
                 <a:cs typeface="Ebrima"/>
               </a:rPr>
-              <a:t>ኢትዮጵያ አለፈላት (2x) መፍትሄ ተገኘላት</a:t>
+              <a:t>ኢትዮጵያ አለፈላት 2x መፍትሄ ተገኘላት</a:t>
             </a:r>
           </a:p>
           <a:p>
@@ -4402,7 +4402,7 @@
                 <a:ea typeface="Ebrima"/>
                 <a:cs typeface="Ebrima"/>
               </a:rPr>
-              <a:t>ኢትዮጵያ አለፈላት (2x) ኃይለኞች መጡላት</a:t>
+              <a:t>ኢትዮጵያ አለፈላት 2x ኃይለኞች መጡላት</a:t>
             </a:r>
           </a:p>
         </p:txBody>
@@ -4487,7 +4487,7 @@
                 <a:ea typeface="Ebrima"/>
                 <a:cs typeface="Ebrima"/>
               </a:rPr>
-              <a:t>ማነው የሰራዊቱ (2x)</a:t>
+              <a:t>ማነው የሰራዊቱ 2x</a:t>
             </a:r>
           </a:p>
           <a:p>
@@ -4770,7 +4770,7 @@
                 <a:ea typeface="Ebrima"/>
                 <a:cs typeface="Ebrima"/>
               </a:rPr>
-              <a:t>ምድር ጉድ ፈላባት (2x) ሰራዊት መጣባት</a:t>
+              <a:t>ምድር ጉድ ፈላባት 2x ሰራዊት መጣባት</a:t>
             </a:r>
           </a:p>
           <a:p>
@@ -4788,7 +4788,7 @@
                 <a:ea typeface="Ebrima"/>
                 <a:cs typeface="Ebrima"/>
               </a:rPr>
-              <a:t>ምድር ጉድ ፈላባት (2x) ወሳኞች መጡባት</a:t>
+              <a:t>ምድር ጉድ ፈላባት 2x ወሳኞች መጡባት</a:t>
             </a:r>
           </a:p>
           <a:p>
@@ -4806,7 +4806,7 @@
                 <a:ea typeface="Ebrima"/>
                 <a:cs typeface="Ebrima"/>
               </a:rPr>
-              <a:t>ኢትዮጵያ አለፈላት (2x) ልፍስፍስ ጠፋላት</a:t>
+              <a:t>ኢትዮጵያ አለፈላት 2x ልፍስፍስ ጠፋላት</a:t>
             </a:r>
           </a:p>
           <a:p>
@@ -4824,7 +4824,7 @@
                 <a:ea typeface="Ebrima"/>
                 <a:cs typeface="Ebrima"/>
               </a:rPr>
-              <a:t>ኢትዮጵያ አለፈላት (2x) ወሳኞች መጡላት</a:t>
+              <a:t>ኢትዮጵያ አለፈላት 2x ወሳኞች መጡላት</a:t>
             </a:r>
           </a:p>
         </p:txBody>
@@ -5313,7 +5313,7 @@
                 <a:ea typeface="Ebrima"/>
                 <a:cs typeface="Ebrima"/>
               </a:rPr>
-              <a:t>ምድር ጉድ ፈላባት (2x) ሰራዊት መጣባት</a:t>
+              <a:t>ምድር ጉድ ፈላባት 2x ሰራዊት መጣባት</a:t>
             </a:r>
           </a:p>
           <a:p>
@@ -5331,7 +5331,7 @@
                 <a:ea typeface="Ebrima"/>
                 <a:cs typeface="Ebrima"/>
               </a:rPr>
-              <a:t>ምድር ጉድ ፈላባት (2x) ሰራዊት መጣባት</a:t>
+              <a:t>ምድር ጉድ ፈላባት 2x ሰራዊት መጣባት</a:t>
             </a:r>
           </a:p>
           <a:p>
@@ -5349,7 +5349,7 @@
                 <a:ea typeface="Ebrima"/>
                 <a:cs typeface="Ebrima"/>
               </a:rPr>
-              <a:t>ምድር አለፈላት (2x) ሰራዊት መጣላት</a:t>
+              <a:t>ምድር አለፈላት 2x ሰራዊት መጣላት</a:t>
             </a:r>
           </a:p>
           <a:p>
@@ -5367,7 +5367,7 @@
                 <a:ea typeface="Ebrima"/>
                 <a:cs typeface="Ebrima"/>
               </a:rPr>
-              <a:t>ምድር አለፈላት (2x) ሰራዊት መጣላት</a:t>
+              <a:t>ምድር አለፈላት 2x ሰራዊት መጣላት</a:t>
             </a:r>
           </a:p>
         </p:txBody>
@@ -5452,7 +5452,7 @@
                 <a:ea typeface="Ebrima"/>
                 <a:cs typeface="Ebrima"/>
               </a:rPr>
-              <a:t>ምን ዓይነት ሰራዊት ነው (2x)</a:t>
+              <a:t>ምን ዓይነት ሰራዊት ነው 2x</a:t>
             </a:r>
           </a:p>
           <a:p>
@@ -5591,7 +5591,7 @@
                 <a:ea typeface="Ebrima"/>
                 <a:cs typeface="Ebrima"/>
               </a:rPr>
-              <a:t>ምድር ጉድ ፈላባት (2x) ሰራዊት መጣባት</a:t>
+              <a:t>ምድር ጉድ ፈላባት 2x ሰራዊት መጣባት</a:t>
             </a:r>
           </a:p>
           <a:p>
@@ -5609,7 +5609,7 @@
                 <a:ea typeface="Ebrima"/>
                 <a:cs typeface="Ebrima"/>
               </a:rPr>
-              <a:t>ምድር ጉድ ፈላባት (2x) ሰራዊት መጣባት</a:t>
+              <a:t>ምድር ጉድ ፈላባት 2x ሰራዊት መጣባት</a:t>
             </a:r>
           </a:p>
           <a:p>
@@ -5627,7 +5627,7 @@
                 <a:ea typeface="Ebrima"/>
                 <a:cs typeface="Ebrima"/>
               </a:rPr>
-              <a:t>ምድር አለፈላት (2x) ሰራዊት መጣላት</a:t>
+              <a:t>ምድር አለፈላት 2x ሰራዊት መጣላት</a:t>
             </a:r>
           </a:p>
           <a:p>
@@ -5645,7 +5645,7 @@
                 <a:ea typeface="Ebrima"/>
                 <a:cs typeface="Ebrima"/>
               </a:rPr>
-              <a:t>ምድር አለፈላት (2x) ሰራዊት መጣላት</a:t>
+              <a:t>ምድር አለፈላት 2x ሰራዊት መጣላት</a:t>
             </a:r>
           </a:p>
         </p:txBody>
@@ -5730,7 +5730,7 @@
                 <a:ea typeface="Ebrima"/>
                 <a:cs typeface="Ebrima"/>
               </a:rPr>
-              <a:t>ምን ዓይነት ሰራዊት ነው (2x)</a:t>
+              <a:t>ምን ዓይነት ሰራዊት ነው 2x</a:t>
             </a:r>
           </a:p>
           <a:p>
@@ -5995,7 +5995,7 @@
                 <a:ea typeface="Ebrima"/>
                 <a:cs typeface="Ebrima"/>
               </a:rPr>
-              <a:t>ምድር ጉድ ፈላባት (2x) ኃያላን መጡባት</a:t>
+              <a:t>ምድር ጉድ ፈላባት 2x ኃያላን መጡባት</a:t>
             </a:r>
           </a:p>
           <a:p>
@@ -6013,7 +6013,7 @@
                 <a:ea typeface="Ebrima"/>
                 <a:cs typeface="Ebrima"/>
               </a:rPr>
-              <a:t>ምድር አለፈላት (2x) ሰራዊት መጣላት</a:t>
+              <a:t>ምድር አለፈላት 2x ሰራዊት መጣላት</a:t>
             </a:r>
           </a:p>
           <a:p>
@@ -6031,7 +6031,7 @@
                 <a:ea typeface="Ebrima"/>
                 <a:cs typeface="Ebrima"/>
               </a:rPr>
-              <a:t>ኢትዮጵያ አለፈላት (2x) ኃያላን መጡላት</a:t>
+              <a:t>ኢትዮጵያ አለፈላት 2x ኃያላን መጡላት</a:t>
             </a:r>
           </a:p>
           <a:p>
@@ -6049,7 +6049,7 @@
                 <a:ea typeface="Ebrima"/>
                 <a:cs typeface="Ebrima"/>
               </a:rPr>
-              <a:t>ኢትዮጵያ አለፈላት (2x) ጌታ ደረሰላት</a:t>
+              <a:t>ኢትዮጵያ አለፈላት 2x ጌታ ደረሰላት</a:t>
             </a:r>
           </a:p>
         </p:txBody>
@@ -6134,7 +6134,7 @@
                 <a:ea typeface="Ebrima"/>
                 <a:cs typeface="Ebrima"/>
               </a:rPr>
-              <a:t>ምን ዓይነት ሰራዊት ነው (2x)</a:t>
+              <a:t>ምን ዓይነት ሰራዊት ነው 2x</a:t>
             </a:r>
           </a:p>
           <a:p>
@@ -6417,7 +6417,7 @@
                 <a:ea typeface="Ebrima"/>
                 <a:cs typeface="Ebrima"/>
               </a:rPr>
-              <a:t>ምድር ጉድ ፈላባት (2x) ሰራዊት መጣባት</a:t>
+              <a:t>ምድር ጉድ ፈላባት 2x ሰራዊት መጣባት</a:t>
             </a:r>
           </a:p>
           <a:p>
@@ -6435,7 +6435,7 @@
                 <a:ea typeface="Ebrima"/>
                 <a:cs typeface="Ebrima"/>
               </a:rPr>
-              <a:t>ምድር አለፈላት (2x) ሰራዊት መጣላት</a:t>
+              <a:t>ምድር አለፈላት 2x ሰራዊት መጣላት</a:t>
             </a:r>
           </a:p>
           <a:p>
@@ -6453,7 +6453,7 @@
                 <a:ea typeface="Ebrima"/>
                 <a:cs typeface="Ebrima"/>
               </a:rPr>
-              <a:t>ኢትዮጵያ አለፈላት (2x) ኢየሱስ መጣላት</a:t>
+              <a:t>ኢትዮጵያ አለፈላት 2x ኢየሱስ መጣላት</a:t>
             </a:r>
           </a:p>
           <a:p>
@@ -6471,7 +6471,7 @@
                 <a:ea typeface="Ebrima"/>
                 <a:cs typeface="Ebrima"/>
               </a:rPr>
-              <a:t>ኢትዮጵያ አለፈላት (2x) ምህረት ወረደላት</a:t>
+              <a:t>ኢትዮጵያ አለፈላት 2x ምህረት ወረደላት</a:t>
             </a:r>
           </a:p>
         </p:txBody>
